--- a/files/cccc-fvi/Interviewing and Observing Slides.pptx
+++ b/files/cccc-fvi/Interviewing and Observing Slides.pptx
@@ -5,35 +5,36 @@
     <p:sldMasterId id="2147483662" r:id="rId1"/>
   </p:sldMasterIdLst>
   <p:notesMasterIdLst>
-    <p:notesMasterId r:id="rId11"/>
+    <p:notesMasterId r:id="rId12"/>
   </p:notesMasterIdLst>
   <p:sldIdLst>
     <p:sldId id="256" r:id="rId2"/>
     <p:sldId id="257" r:id="rId3"/>
     <p:sldId id="258" r:id="rId4"/>
-    <p:sldId id="259" r:id="rId5"/>
-    <p:sldId id="260" r:id="rId6"/>
-    <p:sldId id="261" r:id="rId7"/>
-    <p:sldId id="262" r:id="rId8"/>
-    <p:sldId id="263" r:id="rId9"/>
-    <p:sldId id="264" r:id="rId10"/>
+    <p:sldId id="265" r:id="rId5"/>
+    <p:sldId id="259" r:id="rId6"/>
+    <p:sldId id="260" r:id="rId7"/>
+    <p:sldId id="261" r:id="rId8"/>
+    <p:sldId id="262" r:id="rId9"/>
+    <p:sldId id="263" r:id="rId10"/>
+    <p:sldId id="264" r:id="rId11"/>
   </p:sldIdLst>
   <p:sldSz cx="12192000" cy="6858000"/>
   <p:notesSz cx="6858000" cy="9144000"/>
   <p:embeddedFontLst>
     <p:embeddedFont>
       <p:font typeface="Lato" panose="020F0502020204030203" pitchFamily="34" charset="0"/>
-      <p:regular r:id="rId12"/>
-      <p:bold r:id="rId13"/>
-      <p:italic r:id="rId14"/>
-      <p:boldItalic r:id="rId15"/>
+      <p:regular r:id="rId13"/>
+      <p:bold r:id="rId14"/>
+      <p:italic r:id="rId15"/>
+      <p:boldItalic r:id="rId16"/>
     </p:embeddedFont>
     <p:embeddedFont>
       <p:font typeface="Montserrat" panose="00000500000000000000" pitchFamily="2" charset="0"/>
-      <p:regular r:id="rId16"/>
-      <p:bold r:id="rId17"/>
-      <p:italic r:id="rId18"/>
-      <p:boldItalic r:id="rId19"/>
+      <p:regular r:id="rId17"/>
+      <p:bold r:id="rId18"/>
+      <p:italic r:id="rId19"/>
+      <p:boldItalic r:id="rId20"/>
     </p:embeddedFont>
   </p:embeddedFontLst>
   <p:defaultTextStyle>
@@ -265,6 +266,11 @@
       </a:defRPr>
     </a:lvl9pPr>
   </p:defaultTextStyle>
+  <p:extLst>
+    <p:ext uri="{EFAFB233-063F-42B5-8137-9DF3F51BA10A}">
+      <p15:sldGuideLst xmlns:p15="http://schemas.microsoft.com/office/powerpoint/2012/main"/>
+    </p:ext>
+  </p:extLst>
 </p:presentation>
 </file>
 
@@ -863,6 +869,110 @@
 </p:notes>
 </file>
 
+<file path=ppt/notesSlides/notesSlide10.xml><?xml version="1.0" encoding="utf-8"?>
+<p:notes xmlns:a="http://schemas.openxmlformats.org/drawingml/2006/main" xmlns:r="http://schemas.openxmlformats.org/officeDocument/2006/relationships" xmlns:p="http://schemas.openxmlformats.org/presentationml/2006/main" showMasterSp="0" showMasterPhAnim="0">
+  <p:cSld>
+    <p:spTree>
+      <p:nvGrpSpPr>
+        <p:cNvPr id="1" name="Shape 200"/>
+        <p:cNvGrpSpPr/>
+        <p:nvPr/>
+      </p:nvGrpSpPr>
+      <p:grpSpPr>
+        <a:xfrm>
+          <a:off x="0" y="0"/>
+          <a:ext cx="0" cy="0"/>
+          <a:chOff x="0" y="0"/>
+          <a:chExt cx="0" cy="0"/>
+        </a:xfrm>
+      </p:grpSpPr>
+      <p:sp>
+        <p:nvSpPr>
+          <p:cNvPr id="201" name="Google Shape;201;g3093c8a57ff_0_7:notes"/>
+          <p:cNvSpPr>
+            <a:spLocks noGrp="1" noRot="1" noChangeAspect="1"/>
+          </p:cNvSpPr>
+          <p:nvPr>
+            <p:ph type="sldImg" idx="2"/>
+          </p:nvPr>
+        </p:nvSpPr>
+        <p:spPr>
+          <a:xfrm>
+            <a:off x="1143225" y="685800"/>
+            <a:ext cx="4572300" cy="3429000"/>
+          </a:xfrm>
+          <a:custGeom>
+            <a:avLst/>
+            <a:gdLst/>
+            <a:ahLst/>
+            <a:cxnLst/>
+            <a:rect l="l" t="t" r="r" b="b"/>
+            <a:pathLst>
+              <a:path w="120000" h="120000" extrusionOk="0">
+                <a:moveTo>
+                  <a:pt x="0" y="0"/>
+                </a:moveTo>
+                <a:lnTo>
+                  <a:pt x="120000" y="0"/>
+                </a:lnTo>
+                <a:lnTo>
+                  <a:pt x="120000" y="120000"/>
+                </a:lnTo>
+                <a:lnTo>
+                  <a:pt x="0" y="120000"/>
+                </a:lnTo>
+                <a:close/>
+              </a:path>
+            </a:pathLst>
+          </a:custGeom>
+        </p:spPr>
+      </p:sp>
+      <p:sp>
+        <p:nvSpPr>
+          <p:cNvPr id="202" name="Google Shape;202;g3093c8a57ff_0_7:notes"/>
+          <p:cNvSpPr txBox="1">
+            <a:spLocks noGrp="1"/>
+          </p:cNvSpPr>
+          <p:nvPr>
+            <p:ph type="body" idx="1"/>
+          </p:nvPr>
+        </p:nvSpPr>
+        <p:spPr>
+          <a:xfrm>
+            <a:off x="685800" y="4343400"/>
+            <a:ext cx="5486400" cy="4114800"/>
+          </a:xfrm>
+          <a:prstGeom prst="rect">
+            <a:avLst/>
+          </a:prstGeom>
+        </p:spPr>
+        <p:txBody>
+          <a:bodyPr spcFirstLastPara="1" wrap="square" lIns="91425" tIns="91425" rIns="91425" bIns="91425" anchor="t" anchorCtr="0">
+            <a:noAutofit/>
+          </a:bodyPr>
+          <a:lstStyle/>
+          <a:p>
+            <a:pPr marL="0" lvl="0" indent="0" algn="l" rtl="0">
+              <a:spcBef>
+                <a:spcPts val="0"/>
+              </a:spcBef>
+              <a:spcAft>
+                <a:spcPts val="0"/>
+              </a:spcAft>
+              <a:buNone/>
+            </a:pPr>
+            <a:endParaRPr/>
+          </a:p>
+        </p:txBody>
+      </p:sp>
+    </p:spTree>
+  </p:cSld>
+  <p:clrMapOvr>
+    <a:masterClrMapping/>
+  </p:clrMapOvr>
+</p:notes>
+</file>
+
 <file path=ppt/notesSlides/notesSlide2.xml><?xml version="1.0" encoding="utf-8"?>
 <p:notes xmlns:a="http://schemas.openxmlformats.org/drawingml/2006/main" xmlns:r="http://schemas.openxmlformats.org/officeDocument/2006/relationships" xmlns:p="http://schemas.openxmlformats.org/presentationml/2006/main" showMasterSp="0" showMasterPhAnim="0">
   <p:cSld>
@@ -1176,6 +1286,189 @@
   <p:cSld>
     <p:spTree>
       <p:nvGrpSpPr>
+        <p:cNvPr id="1" name="Shape 159">
+          <a:extLst>
+            <a:ext uri="{FF2B5EF4-FFF2-40B4-BE49-F238E27FC236}">
+              <a16:creationId xmlns:a16="http://schemas.microsoft.com/office/drawing/2014/main" id="{A11CE94E-2D10-F230-36A7-F48068C17017}"/>
+            </a:ext>
+          </a:extLst>
+        </p:cNvPr>
+        <p:cNvGrpSpPr/>
+        <p:nvPr/>
+      </p:nvGrpSpPr>
+      <p:grpSpPr>
+        <a:xfrm>
+          <a:off x="0" y="0"/>
+          <a:ext cx="0" cy="0"/>
+          <a:chOff x="0" y="0"/>
+          <a:chExt cx="0" cy="0"/>
+        </a:xfrm>
+      </p:grpSpPr>
+      <p:sp>
+        <p:nvSpPr>
+          <p:cNvPr id="160" name="Google Shape;160;g39850071467_0_6:notes">
+            <a:extLst>
+              <a:ext uri="{FF2B5EF4-FFF2-40B4-BE49-F238E27FC236}">
+                <a16:creationId xmlns:a16="http://schemas.microsoft.com/office/drawing/2014/main" id="{89C18D40-B7AB-1DE1-DDF7-A851E15E98AE}"/>
+              </a:ext>
+            </a:extLst>
+          </p:cNvPr>
+          <p:cNvSpPr>
+            <a:spLocks noGrp="1" noRot="1" noChangeAspect="1"/>
+          </p:cNvSpPr>
+          <p:nvPr>
+            <p:ph type="sldImg" idx="2"/>
+          </p:nvPr>
+        </p:nvSpPr>
+        <p:spPr>
+          <a:xfrm>
+            <a:off x="685800" y="1143000"/>
+            <a:ext cx="5486400" cy="3086100"/>
+          </a:xfrm>
+          <a:custGeom>
+            <a:avLst/>
+            <a:gdLst/>
+            <a:ahLst/>
+            <a:cxnLst/>
+            <a:rect l="l" t="t" r="r" b="b"/>
+            <a:pathLst>
+              <a:path w="120000" h="120000" extrusionOk="0">
+                <a:moveTo>
+                  <a:pt x="0" y="0"/>
+                </a:moveTo>
+                <a:lnTo>
+                  <a:pt x="120000" y="0"/>
+                </a:lnTo>
+                <a:lnTo>
+                  <a:pt x="120000" y="120000"/>
+                </a:lnTo>
+                <a:lnTo>
+                  <a:pt x="0" y="120000"/>
+                </a:lnTo>
+                <a:close/>
+              </a:path>
+            </a:pathLst>
+          </a:custGeom>
+        </p:spPr>
+      </p:sp>
+      <p:sp>
+        <p:nvSpPr>
+          <p:cNvPr id="161" name="Google Shape;161;g39850071467_0_6:notes">
+            <a:extLst>
+              <a:ext uri="{FF2B5EF4-FFF2-40B4-BE49-F238E27FC236}">
+                <a16:creationId xmlns:a16="http://schemas.microsoft.com/office/drawing/2014/main" id="{20D56DF4-2F9B-F3BA-DE5B-2B5F21BE1364}"/>
+              </a:ext>
+            </a:extLst>
+          </p:cNvPr>
+          <p:cNvSpPr txBox="1">
+            <a:spLocks noGrp="1"/>
+          </p:cNvSpPr>
+          <p:nvPr>
+            <p:ph type="body" idx="1"/>
+          </p:nvPr>
+        </p:nvSpPr>
+        <p:spPr>
+          <a:xfrm>
+            <a:off x="685800" y="4400550"/>
+            <a:ext cx="5486400" cy="3600600"/>
+          </a:xfrm>
+          <a:prstGeom prst="rect">
+            <a:avLst/>
+          </a:prstGeom>
+        </p:spPr>
+        <p:txBody>
+          <a:bodyPr spcFirstLastPara="1" wrap="square" lIns="91425" tIns="91425" rIns="91425" bIns="91425" anchor="t" anchorCtr="0">
+            <a:noAutofit/>
+          </a:bodyPr>
+          <a:lstStyle/>
+          <a:p>
+            <a:pPr marL="0" lvl="0" indent="0" algn="l" rtl="0">
+              <a:spcBef>
+                <a:spcPts val="0"/>
+              </a:spcBef>
+              <a:spcAft>
+                <a:spcPts val="0"/>
+              </a:spcAft>
+              <a:buNone/>
+            </a:pPr>
+            <a:endParaRPr/>
+          </a:p>
+        </p:txBody>
+      </p:sp>
+      <p:sp>
+        <p:nvSpPr>
+          <p:cNvPr id="162" name="Google Shape;162;g39850071467_0_6:notes">
+            <a:extLst>
+              <a:ext uri="{FF2B5EF4-FFF2-40B4-BE49-F238E27FC236}">
+                <a16:creationId xmlns:a16="http://schemas.microsoft.com/office/drawing/2014/main" id="{B75A0A35-78EA-46CA-299D-33CA263EAFAB}"/>
+              </a:ext>
+            </a:extLst>
+          </p:cNvPr>
+          <p:cNvSpPr txBox="1">
+            <a:spLocks noGrp="1"/>
+          </p:cNvSpPr>
+          <p:nvPr>
+            <p:ph type="sldNum" idx="12"/>
+          </p:nvPr>
+        </p:nvSpPr>
+        <p:spPr>
+          <a:xfrm>
+            <a:off x="3884613" y="8685213"/>
+            <a:ext cx="2971800" cy="458700"/>
+          </a:xfrm>
+          <a:prstGeom prst="rect">
+            <a:avLst/>
+          </a:prstGeom>
+          <a:noFill/>
+          <a:ln>
+            <a:noFill/>
+          </a:ln>
+        </p:spPr>
+        <p:txBody>
+          <a:bodyPr spcFirstLastPara="1" wrap="square" lIns="91425" tIns="91425" rIns="91425" bIns="91425" anchor="ctr" anchorCtr="0">
+            <a:noAutofit/>
+          </a:bodyPr>
+          <a:lstStyle/>
+          <a:p>
+            <a:pPr marL="0" lvl="0" indent="0" algn="l" rtl="0">
+              <a:spcBef>
+                <a:spcPts val="0"/>
+              </a:spcBef>
+              <a:spcAft>
+                <a:spcPts val="0"/>
+              </a:spcAft>
+              <a:buClr>
+                <a:srgbClr val="000000"/>
+              </a:buClr>
+              <a:buFont typeface="Arial"/>
+              <a:buNone/>
+            </a:pPr>
+            <a:fld id="{00000000-1234-1234-1234-123412341234}" type="slidenum">
+              <a:rPr lang="en-US"/>
+              <a:t>4</a:t>
+            </a:fld>
+            <a:endParaRPr/>
+          </a:p>
+        </p:txBody>
+      </p:sp>
+    </p:spTree>
+    <p:extLst>
+      <p:ext uri="{BB962C8B-B14F-4D97-AF65-F5344CB8AC3E}">
+        <p14:creationId xmlns:p14="http://schemas.microsoft.com/office/powerpoint/2010/main" val="4153579279"/>
+      </p:ext>
+    </p:extLst>
+  </p:cSld>
+  <p:clrMapOvr>
+    <a:masterClrMapping/>
+  </p:clrMapOvr>
+</p:notes>
+</file>
+
+<file path=ppt/notesSlides/notesSlide5.xml><?xml version="1.0" encoding="utf-8"?>
+<p:notes xmlns:a="http://schemas.openxmlformats.org/drawingml/2006/main" xmlns:r="http://schemas.openxmlformats.org/officeDocument/2006/relationships" xmlns:p="http://schemas.openxmlformats.org/presentationml/2006/main" showMasterSp="0" showMasterPhAnim="0">
+  <p:cSld>
+    <p:spTree>
+      <p:nvGrpSpPr>
         <p:cNvPr id="1" name="Shape 166"/>
         <p:cNvGrpSpPr/>
         <p:nvPr/>
@@ -1311,7 +1604,7 @@
             </a:pPr>
             <a:fld id="{00000000-1234-1234-1234-123412341234}" type="slidenum">
               <a:rPr lang="en-US"/>
-              <a:t>4</a:t>
+              <a:t>5</a:t>
             </a:fld>
             <a:endParaRPr/>
           </a:p>
@@ -1325,7 +1618,7 @@
 </p:notes>
 </file>
 
-<file path=ppt/notesSlides/notesSlide5.xml><?xml version="1.0" encoding="utf-8"?>
+<file path=ppt/notesSlides/notesSlide6.xml><?xml version="1.0" encoding="utf-8"?>
 <p:notes xmlns:a="http://schemas.openxmlformats.org/drawingml/2006/main" xmlns:r="http://schemas.openxmlformats.org/officeDocument/2006/relationships" xmlns:p="http://schemas.openxmlformats.org/presentationml/2006/main" showMasterSp="0" showMasterPhAnim="0">
   <p:cSld>
     <p:spTree>
@@ -1465,7 +1758,7 @@
             </a:pPr>
             <a:fld id="{00000000-1234-1234-1234-123412341234}" type="slidenum">
               <a:rPr lang="en-US"/>
-              <a:t>5</a:t>
+              <a:t>6</a:t>
             </a:fld>
             <a:endParaRPr/>
           </a:p>
@@ -1479,7 +1772,7 @@
 </p:notes>
 </file>
 
-<file path=ppt/notesSlides/notesSlide6.xml><?xml version="1.0" encoding="utf-8"?>
+<file path=ppt/notesSlides/notesSlide7.xml><?xml version="1.0" encoding="utf-8"?>
 <p:notes xmlns:a="http://schemas.openxmlformats.org/drawingml/2006/main" xmlns:r="http://schemas.openxmlformats.org/officeDocument/2006/relationships" xmlns:p="http://schemas.openxmlformats.org/presentationml/2006/main" showMasterSp="0" showMasterPhAnim="0">
   <p:cSld>
     <p:spTree>
@@ -1508,8 +1801,8 @@
         </p:nvSpPr>
         <p:spPr>
           <a:xfrm>
-            <a:off x="1143225" y="685800"/>
-            <a:ext cx="4572300" cy="3429000"/>
+            <a:off x="381000" y="685800"/>
+            <a:ext cx="6096000" cy="3429000"/>
           </a:xfrm>
           <a:custGeom>
             <a:avLst/>
@@ -1583,7 +1876,7 @@
 </p:notes>
 </file>
 
-<file path=ppt/notesSlides/notesSlide7.xml><?xml version="1.0" encoding="utf-8"?>
+<file path=ppt/notesSlides/notesSlide8.xml><?xml version="1.0" encoding="utf-8"?>
 <p:notes xmlns:a="http://schemas.openxmlformats.org/drawingml/2006/main" xmlns:r="http://schemas.openxmlformats.org/officeDocument/2006/relationships" xmlns:p="http://schemas.openxmlformats.org/presentationml/2006/main" showMasterSp="0" showMasterPhAnim="0">
   <p:cSld>
     <p:spTree>
@@ -1687,7 +1980,7 @@
 </p:notes>
 </file>
 
-<file path=ppt/notesSlides/notesSlide8.xml><?xml version="1.0" encoding="utf-8"?>
+<file path=ppt/notesSlides/notesSlide9.xml><?xml version="1.0" encoding="utf-8"?>
 <p:notes xmlns:a="http://schemas.openxmlformats.org/drawingml/2006/main" xmlns:r="http://schemas.openxmlformats.org/officeDocument/2006/relationships" xmlns:p="http://schemas.openxmlformats.org/presentationml/2006/main" showMasterSp="0" showMasterPhAnim="0">
   <p:cSld>
     <p:spTree>
@@ -1716,8 +2009,8 @@
         </p:nvSpPr>
         <p:spPr>
           <a:xfrm>
-            <a:off x="1143225" y="685800"/>
-            <a:ext cx="4572300" cy="3429000"/>
+            <a:off x="381000" y="685800"/>
+            <a:ext cx="6096000" cy="3429000"/>
           </a:xfrm>
           <a:custGeom>
             <a:avLst/>
@@ -1748,110 +2041,6 @@
       <p:sp>
         <p:nvSpPr>
           <p:cNvPr id="196" name="Google Shape;196;g33c4224bece_0_555:notes"/>
-          <p:cNvSpPr txBox="1">
-            <a:spLocks noGrp="1"/>
-          </p:cNvSpPr>
-          <p:nvPr>
-            <p:ph type="body" idx="1"/>
-          </p:nvPr>
-        </p:nvSpPr>
-        <p:spPr>
-          <a:xfrm>
-            <a:off x="685800" y="4343400"/>
-            <a:ext cx="5486400" cy="4114800"/>
-          </a:xfrm>
-          <a:prstGeom prst="rect">
-            <a:avLst/>
-          </a:prstGeom>
-        </p:spPr>
-        <p:txBody>
-          <a:bodyPr spcFirstLastPara="1" wrap="square" lIns="91425" tIns="91425" rIns="91425" bIns="91425" anchor="t" anchorCtr="0">
-            <a:noAutofit/>
-          </a:bodyPr>
-          <a:lstStyle/>
-          <a:p>
-            <a:pPr marL="0" lvl="0" indent="0" algn="l" rtl="0">
-              <a:spcBef>
-                <a:spcPts val="0"/>
-              </a:spcBef>
-              <a:spcAft>
-                <a:spcPts val="0"/>
-              </a:spcAft>
-              <a:buNone/>
-            </a:pPr>
-            <a:endParaRPr/>
-          </a:p>
-        </p:txBody>
-      </p:sp>
-    </p:spTree>
-  </p:cSld>
-  <p:clrMapOvr>
-    <a:masterClrMapping/>
-  </p:clrMapOvr>
-</p:notes>
-</file>
-
-<file path=ppt/notesSlides/notesSlide9.xml><?xml version="1.0" encoding="utf-8"?>
-<p:notes xmlns:a="http://schemas.openxmlformats.org/drawingml/2006/main" xmlns:r="http://schemas.openxmlformats.org/officeDocument/2006/relationships" xmlns:p="http://schemas.openxmlformats.org/presentationml/2006/main" showMasterSp="0" showMasterPhAnim="0">
-  <p:cSld>
-    <p:spTree>
-      <p:nvGrpSpPr>
-        <p:cNvPr id="1" name="Shape 200"/>
-        <p:cNvGrpSpPr/>
-        <p:nvPr/>
-      </p:nvGrpSpPr>
-      <p:grpSpPr>
-        <a:xfrm>
-          <a:off x="0" y="0"/>
-          <a:ext cx="0" cy="0"/>
-          <a:chOff x="0" y="0"/>
-          <a:chExt cx="0" cy="0"/>
-        </a:xfrm>
-      </p:grpSpPr>
-      <p:sp>
-        <p:nvSpPr>
-          <p:cNvPr id="201" name="Google Shape;201;g3093c8a57ff_0_7:notes"/>
-          <p:cNvSpPr>
-            <a:spLocks noGrp="1" noRot="1" noChangeAspect="1"/>
-          </p:cNvSpPr>
-          <p:nvPr>
-            <p:ph type="sldImg" idx="2"/>
-          </p:nvPr>
-        </p:nvSpPr>
-        <p:spPr>
-          <a:xfrm>
-            <a:off x="1143225" y="685800"/>
-            <a:ext cx="4572300" cy="3429000"/>
-          </a:xfrm>
-          <a:custGeom>
-            <a:avLst/>
-            <a:gdLst/>
-            <a:ahLst/>
-            <a:cxnLst/>
-            <a:rect l="l" t="t" r="r" b="b"/>
-            <a:pathLst>
-              <a:path w="120000" h="120000" extrusionOk="0">
-                <a:moveTo>
-                  <a:pt x="0" y="0"/>
-                </a:moveTo>
-                <a:lnTo>
-                  <a:pt x="120000" y="0"/>
-                </a:lnTo>
-                <a:lnTo>
-                  <a:pt x="120000" y="120000"/>
-                </a:lnTo>
-                <a:lnTo>
-                  <a:pt x="0" y="120000"/>
-                </a:lnTo>
-                <a:close/>
-              </a:path>
-            </a:pathLst>
-          </a:custGeom>
-        </p:spPr>
-      </p:sp>
-      <p:sp>
-        <p:nvSpPr>
-          <p:cNvPr id="202" name="Google Shape;202;g3093c8a57ff_0_7:notes"/>
           <p:cNvSpPr txBox="1">
             <a:spLocks noGrp="1"/>
           </p:cNvSpPr>
@@ -11640,6 +11829,179 @@
 </p:sld>
 </file>
 
+<file path=ppt/slides/slide10.xml><?xml version="1.0" encoding="utf-8"?>
+<p:sld xmlns:a="http://schemas.openxmlformats.org/drawingml/2006/main" xmlns:r="http://schemas.openxmlformats.org/officeDocument/2006/relationships" xmlns:p="http://schemas.openxmlformats.org/presentationml/2006/main">
+  <p:cSld>
+    <p:spTree>
+      <p:nvGrpSpPr>
+        <p:cNvPr id="1" name="Shape 203"/>
+        <p:cNvGrpSpPr/>
+        <p:nvPr/>
+      </p:nvGrpSpPr>
+      <p:grpSpPr>
+        <a:xfrm>
+          <a:off x="0" y="0"/>
+          <a:ext cx="0" cy="0"/>
+          <a:chOff x="0" y="0"/>
+          <a:chExt cx="0" cy="0"/>
+        </a:xfrm>
+      </p:grpSpPr>
+      <p:sp>
+        <p:nvSpPr>
+          <p:cNvPr id="204" name="Google Shape;204;p24"/>
+          <p:cNvSpPr txBox="1">
+            <a:spLocks noGrp="1"/>
+          </p:cNvSpPr>
+          <p:nvPr>
+            <p:ph type="title"/>
+          </p:nvPr>
+        </p:nvSpPr>
+        <p:spPr>
+          <a:xfrm>
+            <a:off x="1730000" y="525000"/>
+            <a:ext cx="9385200" cy="1218900"/>
+          </a:xfrm>
+          <a:prstGeom prst="rect">
+            <a:avLst/>
+          </a:prstGeom>
+        </p:spPr>
+        <p:txBody>
+          <a:bodyPr spcFirstLastPara="1" wrap="square" lIns="121900" tIns="121900" rIns="121900" bIns="121900" anchor="t" anchorCtr="0">
+            <a:noAutofit/>
+          </a:bodyPr>
+          <a:lstStyle/>
+          <a:p>
+            <a:pPr marL="0" lvl="0" indent="0" algn="l" rtl="0">
+              <a:spcBef>
+                <a:spcPts val="0"/>
+              </a:spcBef>
+              <a:spcAft>
+                <a:spcPts val="0"/>
+              </a:spcAft>
+              <a:buNone/>
+            </a:pPr>
+            <a:r>
+              <a:rPr lang="en-US" sz="7200"/>
+              <a:t>Learning Activity:</a:t>
+            </a:r>
+            <a:endParaRPr sz="7200"/>
+          </a:p>
+        </p:txBody>
+      </p:sp>
+      <p:sp>
+        <p:nvSpPr>
+          <p:cNvPr id="205" name="Google Shape;205;p24"/>
+          <p:cNvSpPr txBox="1">
+            <a:spLocks noGrp="1"/>
+          </p:cNvSpPr>
+          <p:nvPr>
+            <p:ph type="body" idx="1"/>
+          </p:nvPr>
+        </p:nvSpPr>
+        <p:spPr>
+          <a:xfrm>
+            <a:off x="1916150" y="2096850"/>
+            <a:ext cx="9385200" cy="4323000"/>
+          </a:xfrm>
+          <a:prstGeom prst="rect">
+            <a:avLst/>
+          </a:prstGeom>
+        </p:spPr>
+        <p:txBody>
+          <a:bodyPr spcFirstLastPara="1" wrap="square" lIns="121900" tIns="121900" rIns="121900" bIns="121900" anchor="t" anchorCtr="0">
+            <a:noAutofit/>
+          </a:bodyPr>
+          <a:lstStyle/>
+          <a:p>
+            <a:pPr marL="457200" lvl="0" indent="-381000" algn="l" rtl="0">
+              <a:lnSpc>
+                <a:spcPct val="200000"/>
+              </a:lnSpc>
+              <a:spcBef>
+                <a:spcPts val="0"/>
+              </a:spcBef>
+              <a:spcAft>
+                <a:spcPts val="0"/>
+              </a:spcAft>
+              <a:buSzPts val="2400"/>
+              <a:buAutoNum type="arabicPeriod"/>
+            </a:pPr>
+            <a:r>
+              <a:rPr lang="en-US" sz="2400"/>
+              <a:t>a list of at least 3 sources in MLA format</a:t>
+            </a:r>
+            <a:endParaRPr sz="2400"/>
+          </a:p>
+          <a:p>
+            <a:pPr marL="457200" lvl="0" indent="-381000" algn="l" rtl="0">
+              <a:lnSpc>
+                <a:spcPct val="200000"/>
+              </a:lnSpc>
+              <a:spcBef>
+                <a:spcPts val="0"/>
+              </a:spcBef>
+              <a:spcAft>
+                <a:spcPts val="0"/>
+              </a:spcAft>
+              <a:buSzPts val="2400"/>
+              <a:buAutoNum type="arabicPeriod"/>
+            </a:pPr>
+            <a:r>
+              <a:rPr lang="en-US" sz="2400"/>
+              <a:t>Describe the different perspectives in 2-3 sentences each</a:t>
+            </a:r>
+            <a:endParaRPr sz="2400"/>
+          </a:p>
+          <a:p>
+            <a:pPr marL="457200" lvl="0" indent="-381000" algn="l" rtl="0">
+              <a:lnSpc>
+                <a:spcPct val="200000"/>
+              </a:lnSpc>
+              <a:spcBef>
+                <a:spcPts val="0"/>
+              </a:spcBef>
+              <a:spcAft>
+                <a:spcPts val="0"/>
+              </a:spcAft>
+              <a:buSzPts val="2400"/>
+              <a:buAutoNum type="arabicPeriod"/>
+            </a:pPr>
+            <a:r>
+              <a:rPr lang="en-US" sz="2400"/>
+              <a:t>One idea for your interview or observation</a:t>
+            </a:r>
+            <a:endParaRPr sz="2400"/>
+          </a:p>
+          <a:p>
+            <a:pPr marL="457200" lvl="0" indent="-381000" algn="l" rtl="0">
+              <a:lnSpc>
+                <a:spcPct val="200000"/>
+              </a:lnSpc>
+              <a:spcBef>
+                <a:spcPts val="0"/>
+              </a:spcBef>
+              <a:spcAft>
+                <a:spcPts val="0"/>
+              </a:spcAft>
+              <a:buSzPts val="2400"/>
+              <a:buAutoNum type="arabicPeriod"/>
+            </a:pPr>
+            <a:r>
+              <a:rPr lang="en-US" sz="2400"/>
+              <a:t>Three possible research questions for that source</a:t>
+            </a:r>
+            <a:endParaRPr sz="2400"/>
+          </a:p>
+        </p:txBody>
+      </p:sp>
+    </p:spTree>
+  </p:cSld>
+  <p:clrMapOvr>
+    <a:masterClrMapping/>
+  </p:clrMapOvr>
+</p:sld>
+</file>
+
 <file path=ppt/slides/slide2.xml><?xml version="1.0" encoding="utf-8"?>
 <p:sld xmlns:a="http://schemas.openxmlformats.org/drawingml/2006/main" xmlns:r="http://schemas.openxmlformats.org/officeDocument/2006/relationships" xmlns:p="http://schemas.openxmlformats.org/presentationml/2006/main">
   <p:cSld>
@@ -12029,6 +12391,162 @@
   <p:cSld>
     <p:spTree>
       <p:nvGrpSpPr>
+        <p:cNvPr id="1" name="Shape 163">
+          <a:extLst>
+            <a:ext uri="{FF2B5EF4-FFF2-40B4-BE49-F238E27FC236}">
+              <a16:creationId xmlns:a16="http://schemas.microsoft.com/office/drawing/2014/main" id="{F171FC81-A47A-6CCA-4548-F68A438A73AE}"/>
+            </a:ext>
+          </a:extLst>
+        </p:cNvPr>
+        <p:cNvGrpSpPr/>
+        <p:nvPr/>
+      </p:nvGrpSpPr>
+      <p:grpSpPr>
+        <a:xfrm>
+          <a:off x="0" y="0"/>
+          <a:ext cx="0" cy="0"/>
+          <a:chOff x="0" y="0"/>
+          <a:chExt cx="0" cy="0"/>
+        </a:xfrm>
+      </p:grpSpPr>
+      <p:sp>
+        <p:nvSpPr>
+          <p:cNvPr id="164" name="Google Shape;164;p18">
+            <a:extLst>
+              <a:ext uri="{FF2B5EF4-FFF2-40B4-BE49-F238E27FC236}">
+                <a16:creationId xmlns:a16="http://schemas.microsoft.com/office/drawing/2014/main" id="{2DB03047-BA64-1F1D-8BC5-5D87D5A7CFC4}"/>
+              </a:ext>
+            </a:extLst>
+          </p:cNvPr>
+          <p:cNvSpPr txBox="1">
+            <a:spLocks noGrp="1"/>
+          </p:cNvSpPr>
+          <p:nvPr>
+            <p:ph type="title"/>
+          </p:nvPr>
+        </p:nvSpPr>
+        <p:spPr>
+          <a:xfrm>
+            <a:off x="704275" y="576200"/>
+            <a:ext cx="9601200" cy="798600"/>
+          </a:xfrm>
+          <a:prstGeom prst="rect">
+            <a:avLst/>
+          </a:prstGeom>
+        </p:spPr>
+        <p:txBody>
+          <a:bodyPr spcFirstLastPara="1" wrap="square" lIns="91425" tIns="45700" rIns="91425" bIns="45700" anchor="ctr" anchorCtr="0">
+            <a:noAutofit/>
+          </a:bodyPr>
+          <a:lstStyle/>
+          <a:p>
+            <a:pPr marL="0" lvl="0" indent="0" algn="l" rtl="0">
+              <a:spcBef>
+                <a:spcPts val="0"/>
+              </a:spcBef>
+              <a:spcAft>
+                <a:spcPts val="0"/>
+              </a:spcAft>
+              <a:buNone/>
+            </a:pPr>
+            <a:r>
+              <a:rPr lang="en-US"/>
+              <a:t>How to Write Interview Questions</a:t>
+            </a:r>
+            <a:endParaRPr/>
+          </a:p>
+        </p:txBody>
+      </p:sp>
+      <p:sp>
+        <p:nvSpPr>
+          <p:cNvPr id="165" name="Google Shape;165;p18">
+            <a:extLst>
+              <a:ext uri="{FF2B5EF4-FFF2-40B4-BE49-F238E27FC236}">
+                <a16:creationId xmlns:a16="http://schemas.microsoft.com/office/drawing/2014/main" id="{F38B5015-7F2B-AF6D-228C-D0D0ED669233}"/>
+              </a:ext>
+            </a:extLst>
+          </p:cNvPr>
+          <p:cNvSpPr txBox="1">
+            <a:spLocks noGrp="1"/>
+          </p:cNvSpPr>
+          <p:nvPr>
+            <p:ph type="body" idx="1"/>
+          </p:nvPr>
+        </p:nvSpPr>
+        <p:spPr>
+          <a:xfrm>
+            <a:off x="704275" y="1690825"/>
+            <a:ext cx="10967100" cy="4807200"/>
+          </a:xfrm>
+          <a:prstGeom prst="rect">
+            <a:avLst/>
+          </a:prstGeom>
+        </p:spPr>
+        <p:txBody>
+          <a:bodyPr spcFirstLastPara="1" wrap="square" lIns="91425" tIns="45700" rIns="91425" bIns="45700" anchor="t" anchorCtr="0">
+            <a:normAutofit/>
+          </a:bodyPr>
+          <a:lstStyle/>
+          <a:p>
+            <a:pPr marL="0" lvl="0" indent="0" algn="l" rtl="0">
+              <a:lnSpc>
+                <a:spcPct val="200000"/>
+              </a:lnSpc>
+              <a:spcBef>
+                <a:spcPts val="0"/>
+              </a:spcBef>
+              <a:spcAft>
+                <a:spcPts val="0"/>
+              </a:spcAft>
+              <a:buNone/>
+            </a:pPr>
+            <a:r>
+              <a:rPr lang="en-US" sz="2400" dirty="0"/>
+              <a:t>Try to ask at least one question from each category:</a:t>
+            </a:r>
+            <a:endParaRPr sz="2400" dirty="0"/>
+          </a:p>
+          <a:p>
+            <a:pPr lvl="1" fontAlgn="base"/>
+            <a:r>
+              <a:rPr lang="en-US" sz="2200" dirty="0"/>
+              <a:t>Descriptive (“What’s happening?”)</a:t>
+            </a:r>
+          </a:p>
+          <a:p>
+            <a:pPr lvl="1" fontAlgn="base"/>
+            <a:r>
+              <a:rPr lang="en-US" sz="2200" dirty="0"/>
+              <a:t>Interpretive (“Why is it happening?”)</a:t>
+            </a:r>
+          </a:p>
+          <a:p>
+            <a:pPr lvl="1" fontAlgn="base"/>
+            <a:r>
+              <a:rPr lang="en-US" sz="2200" dirty="0"/>
+              <a:t>Reflective (“How do you think it could change?”)</a:t>
+            </a:r>
+          </a:p>
+        </p:txBody>
+      </p:sp>
+    </p:spTree>
+    <p:extLst>
+      <p:ext uri="{BB962C8B-B14F-4D97-AF65-F5344CB8AC3E}">
+        <p14:creationId xmlns:p14="http://schemas.microsoft.com/office/powerpoint/2010/main" val="1006922039"/>
+      </p:ext>
+    </p:extLst>
+  </p:cSld>
+  <p:clrMapOvr>
+    <a:masterClrMapping/>
+  </p:clrMapOvr>
+</p:sld>
+</file>
+
+<file path=ppt/slides/slide5.xml><?xml version="1.0" encoding="utf-8"?>
+<p:sld xmlns:a="http://schemas.openxmlformats.org/drawingml/2006/main" xmlns:r="http://schemas.openxmlformats.org/officeDocument/2006/relationships" xmlns:p="http://schemas.openxmlformats.org/presentationml/2006/main">
+  <p:cSld>
+    <p:spTree>
+      <p:nvGrpSpPr>
         <p:cNvPr id="1" name="Shape 170"/>
         <p:cNvGrpSpPr/>
         <p:nvPr/>
@@ -12317,7 +12835,7 @@
 </p:sld>
 </file>
 
-<file path=ppt/slides/slide5.xml><?xml version="1.0" encoding="utf-8"?>
+<file path=ppt/slides/slide6.xml><?xml version="1.0" encoding="utf-8"?>
 <p:sld xmlns:a="http://schemas.openxmlformats.org/drawingml/2006/main" xmlns:r="http://schemas.openxmlformats.org/officeDocument/2006/relationships" xmlns:p="http://schemas.openxmlformats.org/presentationml/2006/main">
   <p:cSld>
     <p:spTree>
@@ -12397,7 +12915,7 @@
         </p:spPr>
         <p:txBody>
           <a:bodyPr spcFirstLastPara="1" wrap="square" lIns="91425" tIns="45700" rIns="91425" bIns="45700" anchor="t" anchorCtr="0">
-            <a:normAutofit fontScale="92500"/>
+            <a:normAutofit fontScale="92500" lnSpcReduction="10000"/>
           </a:bodyPr>
           <a:lstStyle/>
           <a:p>
@@ -12534,7 +13052,7 @@
 </p:sld>
 </file>
 
-<file path=ppt/slides/slide6.xml><?xml version="1.0" encoding="utf-8"?>
+<file path=ppt/slides/slide7.xml><?xml version="1.0" encoding="utf-8"?>
 <p:sld xmlns:a="http://schemas.openxmlformats.org/drawingml/2006/main" xmlns:r="http://schemas.openxmlformats.org/officeDocument/2006/relationships" xmlns:p="http://schemas.openxmlformats.org/presentationml/2006/main">
   <p:cSld>
     <p:spTree>
@@ -12614,7 +13132,7 @@
         </p:spPr>
         <p:txBody>
           <a:bodyPr spcFirstLastPara="1" wrap="square" lIns="91425" tIns="45700" rIns="91425" bIns="45700" anchor="t" anchorCtr="0">
-            <a:normAutofit lnSpcReduction="20000"/>
+            <a:normAutofit fontScale="92500" lnSpcReduction="10000"/>
           </a:bodyPr>
           <a:lstStyle/>
           <a:p>
@@ -12707,7 +13225,7 @@
 </p:sld>
 </file>
 
-<file path=ppt/slides/slide7.xml><?xml version="1.0" encoding="utf-8"?>
+<file path=ppt/slides/slide8.xml><?xml version="1.0" encoding="utf-8"?>
 <p:sld xmlns:a="http://schemas.openxmlformats.org/drawingml/2006/main" xmlns:r="http://schemas.openxmlformats.org/officeDocument/2006/relationships" xmlns:p="http://schemas.openxmlformats.org/presentationml/2006/main">
   <p:cSld>
     <p:spTree>
@@ -13166,7 +13684,7 @@
 </p:sld>
 </file>
 
-<file path=ppt/slides/slide8.xml><?xml version="1.0" encoding="utf-8"?>
+<file path=ppt/slides/slide9.xml><?xml version="1.0" encoding="utf-8"?>
 <p:sld xmlns:a="http://schemas.openxmlformats.org/drawingml/2006/main" xmlns:r="http://schemas.openxmlformats.org/officeDocument/2006/relationships" xmlns:p="http://schemas.openxmlformats.org/presentationml/2006/main">
   <p:cSld>
     <p:spTree>
@@ -13246,7 +13764,7 @@
         </p:spPr>
         <p:txBody>
           <a:bodyPr spcFirstLastPara="1" wrap="square" lIns="91425" tIns="45700" rIns="91425" bIns="45700" anchor="t" anchorCtr="0">
-            <a:normAutofit/>
+            <a:normAutofit lnSpcReduction="10000"/>
           </a:bodyPr>
           <a:lstStyle/>
           <a:p>
@@ -13320,179 +13838,6 @@
               <a:t>What quotes provide especially strong evidence, either though research, statistics, or personal experiences?</a:t>
             </a:r>
             <a:endParaRPr sz="2800"/>
-          </a:p>
-        </p:txBody>
-      </p:sp>
-    </p:spTree>
-  </p:cSld>
-  <p:clrMapOvr>
-    <a:masterClrMapping/>
-  </p:clrMapOvr>
-</p:sld>
-</file>
-
-<file path=ppt/slides/slide9.xml><?xml version="1.0" encoding="utf-8"?>
-<p:sld xmlns:a="http://schemas.openxmlformats.org/drawingml/2006/main" xmlns:r="http://schemas.openxmlformats.org/officeDocument/2006/relationships" xmlns:p="http://schemas.openxmlformats.org/presentationml/2006/main">
-  <p:cSld>
-    <p:spTree>
-      <p:nvGrpSpPr>
-        <p:cNvPr id="1" name="Shape 203"/>
-        <p:cNvGrpSpPr/>
-        <p:nvPr/>
-      </p:nvGrpSpPr>
-      <p:grpSpPr>
-        <a:xfrm>
-          <a:off x="0" y="0"/>
-          <a:ext cx="0" cy="0"/>
-          <a:chOff x="0" y="0"/>
-          <a:chExt cx="0" cy="0"/>
-        </a:xfrm>
-      </p:grpSpPr>
-      <p:sp>
-        <p:nvSpPr>
-          <p:cNvPr id="204" name="Google Shape;204;p24"/>
-          <p:cNvSpPr txBox="1">
-            <a:spLocks noGrp="1"/>
-          </p:cNvSpPr>
-          <p:nvPr>
-            <p:ph type="title"/>
-          </p:nvPr>
-        </p:nvSpPr>
-        <p:spPr>
-          <a:xfrm>
-            <a:off x="1730000" y="525000"/>
-            <a:ext cx="9385200" cy="1218900"/>
-          </a:xfrm>
-          <a:prstGeom prst="rect">
-            <a:avLst/>
-          </a:prstGeom>
-        </p:spPr>
-        <p:txBody>
-          <a:bodyPr spcFirstLastPara="1" wrap="square" lIns="121900" tIns="121900" rIns="121900" bIns="121900" anchor="t" anchorCtr="0">
-            <a:noAutofit/>
-          </a:bodyPr>
-          <a:lstStyle/>
-          <a:p>
-            <a:pPr marL="0" lvl="0" indent="0" algn="l" rtl="0">
-              <a:spcBef>
-                <a:spcPts val="0"/>
-              </a:spcBef>
-              <a:spcAft>
-                <a:spcPts val="0"/>
-              </a:spcAft>
-              <a:buNone/>
-            </a:pPr>
-            <a:r>
-              <a:rPr lang="en-US" sz="7200"/>
-              <a:t>Learning Activity:</a:t>
-            </a:r>
-            <a:endParaRPr sz="7200"/>
-          </a:p>
-        </p:txBody>
-      </p:sp>
-      <p:sp>
-        <p:nvSpPr>
-          <p:cNvPr id="205" name="Google Shape;205;p24"/>
-          <p:cNvSpPr txBox="1">
-            <a:spLocks noGrp="1"/>
-          </p:cNvSpPr>
-          <p:nvPr>
-            <p:ph type="body" idx="1"/>
-          </p:nvPr>
-        </p:nvSpPr>
-        <p:spPr>
-          <a:xfrm>
-            <a:off x="1916150" y="2096850"/>
-            <a:ext cx="9385200" cy="4323000"/>
-          </a:xfrm>
-          <a:prstGeom prst="rect">
-            <a:avLst/>
-          </a:prstGeom>
-        </p:spPr>
-        <p:txBody>
-          <a:bodyPr spcFirstLastPara="1" wrap="square" lIns="121900" tIns="121900" rIns="121900" bIns="121900" anchor="t" anchorCtr="0">
-            <a:noAutofit/>
-          </a:bodyPr>
-          <a:lstStyle/>
-          <a:p>
-            <a:pPr marL="457200" lvl="0" indent="-381000" algn="l" rtl="0">
-              <a:lnSpc>
-                <a:spcPct val="200000"/>
-              </a:lnSpc>
-              <a:spcBef>
-                <a:spcPts val="0"/>
-              </a:spcBef>
-              <a:spcAft>
-                <a:spcPts val="0"/>
-              </a:spcAft>
-              <a:buSzPts val="2400"/>
-              <a:buAutoNum type="arabicPeriod"/>
-            </a:pPr>
-            <a:r>
-              <a:rPr lang="en-US" sz="2400"/>
-              <a:t>a list of at least 3 sources in MLA format</a:t>
-            </a:r>
-            <a:endParaRPr sz="2400"/>
-          </a:p>
-          <a:p>
-            <a:pPr marL="457200" lvl="0" indent="-381000" algn="l" rtl="0">
-              <a:lnSpc>
-                <a:spcPct val="200000"/>
-              </a:lnSpc>
-              <a:spcBef>
-                <a:spcPts val="0"/>
-              </a:spcBef>
-              <a:spcAft>
-                <a:spcPts val="0"/>
-              </a:spcAft>
-              <a:buSzPts val="2400"/>
-              <a:buAutoNum type="arabicPeriod"/>
-            </a:pPr>
-            <a:r>
-              <a:rPr lang="en-US" sz="2400"/>
-              <a:t>Describe the different perspectives in 2-3 sentences each</a:t>
-            </a:r>
-            <a:endParaRPr sz="2400"/>
-          </a:p>
-          <a:p>
-            <a:pPr marL="457200" lvl="0" indent="-381000" algn="l" rtl="0">
-              <a:lnSpc>
-                <a:spcPct val="200000"/>
-              </a:lnSpc>
-              <a:spcBef>
-                <a:spcPts val="0"/>
-              </a:spcBef>
-              <a:spcAft>
-                <a:spcPts val="0"/>
-              </a:spcAft>
-              <a:buSzPts val="2400"/>
-              <a:buAutoNum type="arabicPeriod"/>
-            </a:pPr>
-            <a:r>
-              <a:rPr lang="en-US" sz="2400"/>
-              <a:t>One idea for your interview or observation</a:t>
-            </a:r>
-            <a:endParaRPr sz="2400"/>
-          </a:p>
-          <a:p>
-            <a:pPr marL="457200" lvl="0" indent="-381000" algn="l" rtl="0">
-              <a:lnSpc>
-                <a:spcPct val="200000"/>
-              </a:lnSpc>
-              <a:spcBef>
-                <a:spcPts val="0"/>
-              </a:spcBef>
-              <a:spcAft>
-                <a:spcPts val="0"/>
-              </a:spcAft>
-              <a:buSzPts val="2400"/>
-              <a:buAutoNum type="arabicPeriod"/>
-            </a:pPr>
-            <a:r>
-              <a:rPr lang="en-US" sz="2400"/>
-              <a:t>Three possible research questions for that source</a:t>
-            </a:r>
-            <a:endParaRPr sz="2400"/>
           </a:p>
         </p:txBody>
       </p:sp>
